--- a/docs/lectures/lecture_11/11_04_how_anova_is_dummy_var_regression.pptx
+++ b/docs/lectures/lecture_11/11_04_how_anova_is_dummy_var_regression.pptx
@@ -4197,7 +4197,7 @@
       </p:sp>
       <p:graphicFrame xmlns:a="http://schemas.openxmlformats.org/drawingml/2006/main" xmlns:r="http://schemas.openxmlformats.org/officeDocument/2006/relationships" xmlns:p="http://schemas.openxmlformats.org/presentationml/2006/main">
         <p:nvGraphicFramePr>
-          <p:cNvPr id="167291910" name=""/>
+          <p:cNvPr id="791312156" name=""/>
           <p:cNvGraphicFramePr>
             <a:graphicFrameLocks noGrp="true"/>
           </p:cNvGraphicFramePr>
@@ -4298,7 +4298,7 @@
       </p:sp>
       <p:graphicFrame xmlns:a="http://schemas.openxmlformats.org/drawingml/2006/main" xmlns:r="http://schemas.openxmlformats.org/officeDocument/2006/relationships" xmlns:p="http://schemas.openxmlformats.org/presentationml/2006/main">
         <p:nvGraphicFramePr>
-          <p:cNvPr id="910612961" name=""/>
+          <p:cNvPr id="129795283" name=""/>
           <p:cNvGraphicFramePr>
             <a:graphicFrameLocks noGrp="true"/>
           </p:cNvGraphicFramePr>
@@ -5181,7 +5181,7 @@
       </p:sp>
       <p:graphicFrame xmlns:a="http://schemas.openxmlformats.org/drawingml/2006/main" xmlns:r="http://schemas.openxmlformats.org/officeDocument/2006/relationships" xmlns:p="http://schemas.openxmlformats.org/presentationml/2006/main">
         <p:nvGraphicFramePr>
-          <p:cNvPr id="617969040" name=""/>
+          <p:cNvPr id="425369563" name=""/>
           <p:cNvGraphicFramePr>
             <a:graphicFrameLocks noGrp="true"/>
           </p:cNvGraphicFramePr>
@@ -6744,7 +6744,7 @@
       </p:sp>
       <p:graphicFrame xmlns:a="http://schemas.openxmlformats.org/drawingml/2006/main" xmlns:r="http://schemas.openxmlformats.org/officeDocument/2006/relationships" xmlns:p="http://schemas.openxmlformats.org/presentationml/2006/main">
         <p:nvGraphicFramePr>
-          <p:cNvPr id="938075098" name=""/>
+          <p:cNvPr id="571422091" name=""/>
           <p:cNvGraphicFramePr>
             <a:graphicFrameLocks noGrp="true"/>
           </p:cNvGraphicFramePr>

--- a/docs/lectures/lecture_11/11_04_how_anova_is_dummy_var_regression.pptx
+++ b/docs/lectures/lecture_11/11_04_how_anova_is_dummy_var_regression.pptx
@@ -4197,7 +4197,7 @@
       </p:sp>
       <p:graphicFrame xmlns:a="http://schemas.openxmlformats.org/drawingml/2006/main" xmlns:r="http://schemas.openxmlformats.org/officeDocument/2006/relationships" xmlns:p="http://schemas.openxmlformats.org/presentationml/2006/main">
         <p:nvGraphicFramePr>
-          <p:cNvPr id="791312156" name=""/>
+          <p:cNvPr id="638766775" name=""/>
           <p:cNvGraphicFramePr>
             <a:graphicFrameLocks noGrp="true"/>
           </p:cNvGraphicFramePr>
@@ -4298,7 +4298,7 @@
       </p:sp>
       <p:graphicFrame xmlns:a="http://schemas.openxmlformats.org/drawingml/2006/main" xmlns:r="http://schemas.openxmlformats.org/officeDocument/2006/relationships" xmlns:p="http://schemas.openxmlformats.org/presentationml/2006/main">
         <p:nvGraphicFramePr>
-          <p:cNvPr id="129795283" name=""/>
+          <p:cNvPr id="208621092" name=""/>
           <p:cNvGraphicFramePr>
             <a:graphicFrameLocks noGrp="true"/>
           </p:cNvGraphicFramePr>
@@ -5181,7 +5181,7 @@
       </p:sp>
       <p:graphicFrame xmlns:a="http://schemas.openxmlformats.org/drawingml/2006/main" xmlns:r="http://schemas.openxmlformats.org/officeDocument/2006/relationships" xmlns:p="http://schemas.openxmlformats.org/presentationml/2006/main">
         <p:nvGraphicFramePr>
-          <p:cNvPr id="425369563" name=""/>
+          <p:cNvPr id="877666250" name=""/>
           <p:cNvGraphicFramePr>
             <a:graphicFrameLocks noGrp="true"/>
           </p:cNvGraphicFramePr>
@@ -6744,7 +6744,7 @@
       </p:sp>
       <p:graphicFrame xmlns:a="http://schemas.openxmlformats.org/drawingml/2006/main" xmlns:r="http://schemas.openxmlformats.org/officeDocument/2006/relationships" xmlns:p="http://schemas.openxmlformats.org/presentationml/2006/main">
         <p:nvGraphicFramePr>
-          <p:cNvPr id="571422091" name=""/>
+          <p:cNvPr id="549911540" name=""/>
           <p:cNvGraphicFramePr>
             <a:graphicFrameLocks noGrp="true"/>
           </p:cNvGraphicFramePr>

--- a/docs/lectures/lecture_11/11_04_how_anova_is_dummy_var_regression.pptx
+++ b/docs/lectures/lecture_11/11_04_how_anova_is_dummy_var_regression.pptx
@@ -4197,7 +4197,7 @@
       </p:sp>
       <p:graphicFrame xmlns:a="http://schemas.openxmlformats.org/drawingml/2006/main" xmlns:r="http://schemas.openxmlformats.org/officeDocument/2006/relationships" xmlns:p="http://schemas.openxmlformats.org/presentationml/2006/main">
         <p:nvGraphicFramePr>
-          <p:cNvPr id="520066976" name=""/>
+          <p:cNvPr id="399120431" name=""/>
           <p:cNvGraphicFramePr>
             <a:graphicFrameLocks noGrp="true"/>
           </p:cNvGraphicFramePr>
@@ -4298,7 +4298,7 @@
       </p:sp>
       <p:graphicFrame xmlns:a="http://schemas.openxmlformats.org/drawingml/2006/main" xmlns:r="http://schemas.openxmlformats.org/officeDocument/2006/relationships" xmlns:p="http://schemas.openxmlformats.org/presentationml/2006/main">
         <p:nvGraphicFramePr>
-          <p:cNvPr id="900866917" name=""/>
+          <p:cNvPr id="741301419" name=""/>
           <p:cNvGraphicFramePr>
             <a:graphicFrameLocks noGrp="true"/>
           </p:cNvGraphicFramePr>
@@ -5181,7 +5181,7 @@
       </p:sp>
       <p:graphicFrame xmlns:a="http://schemas.openxmlformats.org/drawingml/2006/main" xmlns:r="http://schemas.openxmlformats.org/officeDocument/2006/relationships" xmlns:p="http://schemas.openxmlformats.org/presentationml/2006/main">
         <p:nvGraphicFramePr>
-          <p:cNvPr id="373563749" name=""/>
+          <p:cNvPr id="294399266" name=""/>
           <p:cNvGraphicFramePr>
             <a:graphicFrameLocks noGrp="true"/>
           </p:cNvGraphicFramePr>
@@ -6744,7 +6744,7 @@
       </p:sp>
       <p:graphicFrame xmlns:a="http://schemas.openxmlformats.org/drawingml/2006/main" xmlns:r="http://schemas.openxmlformats.org/officeDocument/2006/relationships" xmlns:p="http://schemas.openxmlformats.org/presentationml/2006/main">
         <p:nvGraphicFramePr>
-          <p:cNvPr id="292018743" name=""/>
+          <p:cNvPr id="813122048" name=""/>
           <p:cNvGraphicFramePr>
             <a:graphicFrameLocks noGrp="true"/>
           </p:cNvGraphicFramePr>

--- a/docs/lectures/lecture_11/11_04_how_anova_is_dummy_var_regression.pptx
+++ b/docs/lectures/lecture_11/11_04_how_anova_is_dummy_var_regression.pptx
@@ -4197,7 +4197,7 @@
       </p:sp>
       <p:graphicFrame xmlns:a="http://schemas.openxmlformats.org/drawingml/2006/main" xmlns:r="http://schemas.openxmlformats.org/officeDocument/2006/relationships" xmlns:p="http://schemas.openxmlformats.org/presentationml/2006/main">
         <p:nvGraphicFramePr>
-          <p:cNvPr id="850926219" name=""/>
+          <p:cNvPr id="594820816" name=""/>
           <p:cNvGraphicFramePr>
             <a:graphicFrameLocks noGrp="true"/>
           </p:cNvGraphicFramePr>
@@ -4298,7 +4298,7 @@
       </p:sp>
       <p:graphicFrame xmlns:a="http://schemas.openxmlformats.org/drawingml/2006/main" xmlns:r="http://schemas.openxmlformats.org/officeDocument/2006/relationships" xmlns:p="http://schemas.openxmlformats.org/presentationml/2006/main">
         <p:nvGraphicFramePr>
-          <p:cNvPr id="846179194" name=""/>
+          <p:cNvPr id="416212573" name=""/>
           <p:cNvGraphicFramePr>
             <a:graphicFrameLocks noGrp="true"/>
           </p:cNvGraphicFramePr>
@@ -5181,7 +5181,7 @@
       </p:sp>
       <p:graphicFrame xmlns:a="http://schemas.openxmlformats.org/drawingml/2006/main" xmlns:r="http://schemas.openxmlformats.org/officeDocument/2006/relationships" xmlns:p="http://schemas.openxmlformats.org/presentationml/2006/main">
         <p:nvGraphicFramePr>
-          <p:cNvPr id="539005948" name=""/>
+          <p:cNvPr id="638295088" name=""/>
           <p:cNvGraphicFramePr>
             <a:graphicFrameLocks noGrp="true"/>
           </p:cNvGraphicFramePr>
@@ -6744,7 +6744,7 @@
       </p:sp>
       <p:graphicFrame xmlns:a="http://schemas.openxmlformats.org/drawingml/2006/main" xmlns:r="http://schemas.openxmlformats.org/officeDocument/2006/relationships" xmlns:p="http://schemas.openxmlformats.org/presentationml/2006/main">
         <p:nvGraphicFramePr>
-          <p:cNvPr id="499802917" name=""/>
+          <p:cNvPr id="300984870" name=""/>
           <p:cNvGraphicFramePr>
             <a:graphicFrameLocks noGrp="true"/>
           </p:cNvGraphicFramePr>

--- a/docs/lectures/lecture_11/11_04_how_anova_is_dummy_var_regression.pptx
+++ b/docs/lectures/lecture_11/11_04_how_anova_is_dummy_var_regression.pptx
@@ -4197,7 +4197,7 @@
       </p:sp>
       <p:graphicFrame xmlns:a="http://schemas.openxmlformats.org/drawingml/2006/main" xmlns:r="http://schemas.openxmlformats.org/officeDocument/2006/relationships" xmlns:p="http://schemas.openxmlformats.org/presentationml/2006/main">
         <p:nvGraphicFramePr>
-          <p:cNvPr id="84586803" name=""/>
+          <p:cNvPr id="10923799" name=""/>
           <p:cNvGraphicFramePr>
             <a:graphicFrameLocks noGrp="true"/>
           </p:cNvGraphicFramePr>
@@ -4298,7 +4298,7 @@
       </p:sp>
       <p:graphicFrame xmlns:a="http://schemas.openxmlformats.org/drawingml/2006/main" xmlns:r="http://schemas.openxmlformats.org/officeDocument/2006/relationships" xmlns:p="http://schemas.openxmlformats.org/presentationml/2006/main">
         <p:nvGraphicFramePr>
-          <p:cNvPr id="386706727" name=""/>
+          <p:cNvPr id="307323882" name=""/>
           <p:cNvGraphicFramePr>
             <a:graphicFrameLocks noGrp="true"/>
           </p:cNvGraphicFramePr>
@@ -5181,7 +5181,7 @@
       </p:sp>
       <p:graphicFrame xmlns:a="http://schemas.openxmlformats.org/drawingml/2006/main" xmlns:r="http://schemas.openxmlformats.org/officeDocument/2006/relationships" xmlns:p="http://schemas.openxmlformats.org/presentationml/2006/main">
         <p:nvGraphicFramePr>
-          <p:cNvPr id="724565010" name=""/>
+          <p:cNvPr id="221138580" name=""/>
           <p:cNvGraphicFramePr>
             <a:graphicFrameLocks noGrp="true"/>
           </p:cNvGraphicFramePr>
@@ -6744,7 +6744,7 @@
       </p:sp>
       <p:graphicFrame xmlns:a="http://schemas.openxmlformats.org/drawingml/2006/main" xmlns:r="http://schemas.openxmlformats.org/officeDocument/2006/relationships" xmlns:p="http://schemas.openxmlformats.org/presentationml/2006/main">
         <p:nvGraphicFramePr>
-          <p:cNvPr id="168752689" name=""/>
+          <p:cNvPr id="552815578" name=""/>
           <p:cNvGraphicFramePr>
             <a:graphicFrameLocks noGrp="true"/>
           </p:cNvGraphicFramePr>

--- a/docs/lectures/lecture_11/11_04_how_anova_is_dummy_var_regression.pptx
+++ b/docs/lectures/lecture_11/11_04_how_anova_is_dummy_var_regression.pptx
@@ -4197,7 +4197,7 @@
       </p:sp>
       <p:graphicFrame xmlns:a="http://schemas.openxmlformats.org/drawingml/2006/main" xmlns:r="http://schemas.openxmlformats.org/officeDocument/2006/relationships" xmlns:p="http://schemas.openxmlformats.org/presentationml/2006/main">
         <p:nvGraphicFramePr>
-          <p:cNvPr id="10923799" name=""/>
+          <p:cNvPr id="74481164" name=""/>
           <p:cNvGraphicFramePr>
             <a:graphicFrameLocks noGrp="true"/>
           </p:cNvGraphicFramePr>
@@ -4298,7 +4298,7 @@
       </p:sp>
       <p:graphicFrame xmlns:a="http://schemas.openxmlformats.org/drawingml/2006/main" xmlns:r="http://schemas.openxmlformats.org/officeDocument/2006/relationships" xmlns:p="http://schemas.openxmlformats.org/presentationml/2006/main">
         <p:nvGraphicFramePr>
-          <p:cNvPr id="307323882" name=""/>
+          <p:cNvPr id="587629434" name=""/>
           <p:cNvGraphicFramePr>
             <a:graphicFrameLocks noGrp="true"/>
           </p:cNvGraphicFramePr>
@@ -5181,7 +5181,7 @@
       </p:sp>
       <p:graphicFrame xmlns:a="http://schemas.openxmlformats.org/drawingml/2006/main" xmlns:r="http://schemas.openxmlformats.org/officeDocument/2006/relationships" xmlns:p="http://schemas.openxmlformats.org/presentationml/2006/main">
         <p:nvGraphicFramePr>
-          <p:cNvPr id="221138580" name=""/>
+          <p:cNvPr id="244769666" name=""/>
           <p:cNvGraphicFramePr>
             <a:graphicFrameLocks noGrp="true"/>
           </p:cNvGraphicFramePr>
@@ -6744,7 +6744,7 @@
       </p:sp>
       <p:graphicFrame xmlns:a="http://schemas.openxmlformats.org/drawingml/2006/main" xmlns:r="http://schemas.openxmlformats.org/officeDocument/2006/relationships" xmlns:p="http://schemas.openxmlformats.org/presentationml/2006/main">
         <p:nvGraphicFramePr>
-          <p:cNvPr id="552815578" name=""/>
+          <p:cNvPr id="679333782" name=""/>
           <p:cNvGraphicFramePr>
             <a:graphicFrameLocks noGrp="true"/>
           </p:cNvGraphicFramePr>
